--- a/PPTs/02_workflow orchestration framework.pptx
+++ b/PPTs/02_workflow orchestration framework.pptx
@@ -5,10 +5,10 @@
     <p:sldMasterId id="2147483660" r:id="rId1"/>
   </p:sldMasterIdLst>
   <p:notesMasterIdLst>
-    <p:notesMasterId r:id="rId36"/>
+    <p:notesMasterId r:id="rId38"/>
   </p:notesMasterIdLst>
   <p:handoutMasterIdLst>
-    <p:handoutMasterId r:id="rId37"/>
+    <p:handoutMasterId r:id="rId39"/>
   </p:handoutMasterIdLst>
   <p:sldIdLst>
     <p:sldId id="1151" r:id="rId2"/>
@@ -41,10 +41,12 @@
     <p:sldId id="1335" r:id="rId29"/>
     <p:sldId id="1338" r:id="rId30"/>
     <p:sldId id="1314" r:id="rId31"/>
-    <p:sldId id="1315" r:id="rId32"/>
-    <p:sldId id="1316" r:id="rId33"/>
-    <p:sldId id="1255" r:id="rId34"/>
-    <p:sldId id="1339" r:id="rId35"/>
+    <p:sldId id="1340" r:id="rId32"/>
+    <p:sldId id="1170" r:id="rId33"/>
+    <p:sldId id="1315" r:id="rId34"/>
+    <p:sldId id="1316" r:id="rId35"/>
+    <p:sldId id="1255" r:id="rId36"/>
+    <p:sldId id="1339" r:id="rId37"/>
   </p:sldIdLst>
   <p:sldSz cx="12192000" cy="6858000"/>
   <p:notesSz cx="6858000" cy="9144000"/>
@@ -181,6 +183,8 @@
             <p14:sldId id="1335"/>
             <p14:sldId id="1338"/>
             <p14:sldId id="1314"/>
+            <p14:sldId id="1340"/>
+            <p14:sldId id="1170"/>
             <p14:sldId id="1315"/>
             <p14:sldId id="1316"/>
             <p14:sldId id="1255"/>
@@ -22326,6 +22330,993 @@
   <p:cSld>
     <p:spTree>
       <p:nvGrpSpPr>
+        <p:cNvPr id="1" name="">
+          <a:extLst>
+            <a:ext uri="{FF2B5EF4-FFF2-40B4-BE49-F238E27FC236}">
+              <a16:creationId xmlns:a16="http://schemas.microsoft.com/office/drawing/2014/main" id="{FC2330CD-4BA5-FF9A-FA8A-248DEC96ABF4}"/>
+            </a:ext>
+          </a:extLst>
+        </p:cNvPr>
+        <p:cNvGrpSpPr/>
+        <p:nvPr/>
+      </p:nvGrpSpPr>
+      <p:grpSpPr>
+        <a:xfrm>
+          <a:off x="0" y="0"/>
+          <a:ext cx="0" cy="0"/>
+          <a:chOff x="0" y="0"/>
+          <a:chExt cx="0" cy="0"/>
+        </a:xfrm>
+      </p:grpSpPr>
+      <p:sp>
+        <p:nvSpPr>
+          <p:cNvPr id="4" name="슬라이드 번호 개체 틀 3">
+            <a:extLst>
+              <a:ext uri="{FF2B5EF4-FFF2-40B4-BE49-F238E27FC236}">
+                <a16:creationId xmlns:a16="http://schemas.microsoft.com/office/drawing/2014/main" id="{C5E44ABC-6593-04C2-44B8-E560E96A64C4}"/>
+              </a:ext>
+            </a:extLst>
+          </p:cNvPr>
+          <p:cNvSpPr>
+            <a:spLocks noGrp="1"/>
+          </p:cNvSpPr>
+          <p:nvPr>
+            <p:ph type="sldNum" sz="quarter" idx="12"/>
+          </p:nvPr>
+        </p:nvSpPr>
+        <p:spPr>
+          <a:xfrm>
+            <a:off x="10514011" y="6036261"/>
+            <a:ext cx="753545" cy="365125"/>
+          </a:xfrm>
+        </p:spPr>
+        <p:txBody>
+          <a:bodyPr/>
+          <a:lstStyle/>
+          <a:p>
+            <a:fld id="{D57F1E4F-1CFF-5643-939E-217C01CDF565}" type="slidenum">
+              <a:rPr lang="en-US" smtClean="0"/>
+              <a:pPr/>
+              <a:t>31</a:t>
+            </a:fld>
+            <a:endParaRPr lang="en-US" dirty="0"/>
+          </a:p>
+        </p:txBody>
+      </p:sp>
+      <p:sp>
+        <p:nvSpPr>
+          <p:cNvPr id="3" name="제목 1">
+            <a:extLst>
+              <a:ext uri="{FF2B5EF4-FFF2-40B4-BE49-F238E27FC236}">
+                <a16:creationId xmlns:a16="http://schemas.microsoft.com/office/drawing/2014/main" id="{FADD2B8E-3F9B-9F4E-4BCD-CD2A128F52A9}"/>
+              </a:ext>
+            </a:extLst>
+          </p:cNvPr>
+          <p:cNvSpPr txBox="1">
+            <a:spLocks/>
+          </p:cNvSpPr>
+          <p:nvPr/>
+        </p:nvSpPr>
+        <p:spPr>
+          <a:xfrm>
+            <a:off x="475645" y="481983"/>
+            <a:ext cx="10353762" cy="766439"/>
+          </a:xfrm>
+          <a:prstGeom prst="rect">
+            <a:avLst/>
+          </a:prstGeom>
+        </p:spPr>
+        <p:txBody>
+          <a:bodyPr vert="horz" lIns="91440" tIns="45720" rIns="91440" bIns="45720" rtlCol="0" anchor="ctr">
+            <a:normAutofit/>
+          </a:bodyPr>
+          <a:lstStyle>
+            <a:lvl1pPr algn="ctr" defTabSz="914400" rtl="0" eaLnBrk="1" latinLnBrk="1" hangingPunct="1">
+              <a:lnSpc>
+                <a:spcPct val="90000"/>
+              </a:lnSpc>
+              <a:spcBef>
+                <a:spcPct val="0"/>
+              </a:spcBef>
+              <a:buNone/>
+              <a:defRPr sz="3200" kern="1200" cap="all" baseline="0">
+                <a:solidFill>
+                  <a:schemeClr val="tx1"/>
+                </a:solidFill>
+                <a:effectLst/>
+                <a:latin typeface="Batang" panose="02030600000101010101" pitchFamily="18" charset="-127"/>
+                <a:ea typeface="Batang" panose="02030600000101010101" pitchFamily="18" charset="-127"/>
+                <a:cs typeface="+mj-cs"/>
+              </a:defRPr>
+            </a:lvl1pPr>
+          </a:lstStyle>
+          <a:p>
+            <a:pPr algn="l"/>
+            <a:r>
+              <a:rPr lang="en-US" altLang="ko-KR" sz="2800" b="1" cap="none" dirty="0">
+                <a:latin typeface="Lora" pitchFamily="2" charset="0"/>
+              </a:rPr>
+              <a:t>Cline</a:t>
+            </a:r>
+          </a:p>
+        </p:txBody>
+      </p:sp>
+      <p:sp>
+        <p:nvSpPr>
+          <p:cNvPr id="5" name="TextBox 4">
+            <a:extLst>
+              <a:ext uri="{FF2B5EF4-FFF2-40B4-BE49-F238E27FC236}">
+                <a16:creationId xmlns:a16="http://schemas.microsoft.com/office/drawing/2014/main" id="{32BBB9A3-B4CC-6D56-9BCC-D79C476B62E4}"/>
+              </a:ext>
+            </a:extLst>
+          </p:cNvPr>
+          <p:cNvSpPr txBox="1"/>
+          <p:nvPr/>
+        </p:nvSpPr>
+        <p:spPr>
+          <a:xfrm>
+            <a:off x="544944" y="1510391"/>
+            <a:ext cx="11028219" cy="3378489"/>
+          </a:xfrm>
+          <a:prstGeom prst="rect">
+            <a:avLst/>
+          </a:prstGeom>
+          <a:noFill/>
+        </p:spPr>
+        <p:txBody>
+          <a:bodyPr wrap="square">
+            <a:spAutoFit/>
+          </a:bodyPr>
+          <a:lstStyle/>
+          <a:p>
+            <a:pPr marL="285750" indent="-285750">
+              <a:lnSpc>
+                <a:spcPct val="150000"/>
+              </a:lnSpc>
+              <a:buFont typeface="Wingdings" panose="05000000000000000000" pitchFamily="2" charset="2"/>
+              <a:buChar char="v"/>
+            </a:pPr>
+            <a:r>
+              <a:rPr lang="ko-KR" altLang="ko-KR" sz="1600" dirty="0">
+                <a:latin typeface="D2Coding" panose="020B0609020101020101" pitchFamily="49" charset="-127"/>
+                <a:ea typeface="D2Coding" panose="020B0609020101020101" pitchFamily="49" charset="-127"/>
+              </a:rPr>
+              <a:t>Microsoft </a:t>
+            </a:r>
+            <a:r>
+              <a:rPr lang="ko-KR" altLang="ko-KR" sz="1600" dirty="0" err="1">
+                <a:latin typeface="D2Coding" panose="020B0609020101020101" pitchFamily="49" charset="-127"/>
+                <a:ea typeface="D2Coding" panose="020B0609020101020101" pitchFamily="49" charset="-127"/>
+              </a:rPr>
+              <a:t>Visual</a:t>
+            </a:r>
+            <a:r>
+              <a:rPr lang="ko-KR" altLang="ko-KR" sz="1600" dirty="0">
+                <a:latin typeface="D2Coding" panose="020B0609020101020101" pitchFamily="49" charset="-127"/>
+                <a:ea typeface="D2Coding" panose="020B0609020101020101" pitchFamily="49" charset="-127"/>
+              </a:rPr>
+              <a:t> </a:t>
+            </a:r>
+            <a:r>
+              <a:rPr lang="ko-KR" altLang="ko-KR" sz="1600" dirty="0" err="1">
+                <a:latin typeface="D2Coding" panose="020B0609020101020101" pitchFamily="49" charset="-127"/>
+                <a:ea typeface="D2Coding" panose="020B0609020101020101" pitchFamily="49" charset="-127"/>
+              </a:rPr>
+              <a:t>Studio</a:t>
+            </a:r>
+            <a:r>
+              <a:rPr lang="ko-KR" altLang="ko-KR" sz="1600" dirty="0">
+                <a:latin typeface="D2Coding" panose="020B0609020101020101" pitchFamily="49" charset="-127"/>
+                <a:ea typeface="D2Coding" panose="020B0609020101020101" pitchFamily="49" charset="-127"/>
+              </a:rPr>
+              <a:t> </a:t>
+            </a:r>
+            <a:r>
+              <a:rPr lang="ko-KR" altLang="ko-KR" sz="1600" dirty="0" err="1">
+                <a:latin typeface="D2Coding" panose="020B0609020101020101" pitchFamily="49" charset="-127"/>
+                <a:ea typeface="D2Coding" panose="020B0609020101020101" pitchFamily="49" charset="-127"/>
+              </a:rPr>
+              <a:t>Code에</a:t>
+            </a:r>
+            <a:r>
+              <a:rPr lang="ko-KR" altLang="ko-KR" sz="1600" dirty="0">
+                <a:latin typeface="D2Coding" panose="020B0609020101020101" pitchFamily="49" charset="-127"/>
+                <a:ea typeface="D2Coding" panose="020B0609020101020101" pitchFamily="49" charset="-127"/>
+              </a:rPr>
+              <a:t> 플러그인으로 설치하는 오픈 소스 AI 개발 어시스턴트</a:t>
+            </a:r>
+            <a:endParaRPr lang="en-US" altLang="ko-KR" sz="1600" dirty="0">
+              <a:latin typeface="D2Coding" panose="020B0609020101020101" pitchFamily="49" charset="-127"/>
+              <a:ea typeface="D2Coding" panose="020B0609020101020101" pitchFamily="49" charset="-127"/>
+            </a:endParaRPr>
+          </a:p>
+          <a:p>
+            <a:pPr marL="285750" indent="-285750">
+              <a:lnSpc>
+                <a:spcPct val="150000"/>
+              </a:lnSpc>
+              <a:buFont typeface="Wingdings" panose="05000000000000000000" pitchFamily="2" charset="2"/>
+              <a:buChar char="v"/>
+            </a:pPr>
+            <a:endParaRPr lang="en-US" altLang="ko-KR" sz="1600" dirty="0">
+              <a:latin typeface="D2Coding" panose="020B0609020101020101" pitchFamily="49" charset="-127"/>
+              <a:ea typeface="D2Coding" panose="020B0609020101020101" pitchFamily="49" charset="-127"/>
+            </a:endParaRPr>
+          </a:p>
+          <a:p>
+            <a:pPr marL="285750" indent="-285750">
+              <a:lnSpc>
+                <a:spcPct val="150000"/>
+              </a:lnSpc>
+              <a:buFont typeface="Wingdings" panose="05000000000000000000" pitchFamily="2" charset="2"/>
+              <a:buChar char="v"/>
+            </a:pPr>
+            <a:r>
+              <a:rPr lang="ko-KR" altLang="ko-KR" sz="1600" dirty="0">
+                <a:latin typeface="D2Coding" panose="020B0609020101020101" pitchFamily="49" charset="-127"/>
+                <a:ea typeface="D2Coding" panose="020B0609020101020101" pitchFamily="49" charset="-127"/>
+              </a:rPr>
+              <a:t>개발 </a:t>
+            </a:r>
+            <a:r>
+              <a:rPr lang="ko-KR" altLang="ko-KR" sz="1600" dirty="0" err="1">
+                <a:latin typeface="D2Coding" panose="020B0609020101020101" pitchFamily="49" charset="-127"/>
+                <a:ea typeface="D2Coding" panose="020B0609020101020101" pitchFamily="49" charset="-127"/>
+              </a:rPr>
+              <a:t>IDE인</a:t>
+            </a:r>
+            <a:r>
+              <a:rPr lang="ko-KR" altLang="ko-KR" sz="1600" dirty="0">
+                <a:latin typeface="D2Coding" panose="020B0609020101020101" pitchFamily="49" charset="-127"/>
+                <a:ea typeface="D2Coding" panose="020B0609020101020101" pitchFamily="49" charset="-127"/>
+              </a:rPr>
+              <a:t> </a:t>
+            </a:r>
+            <a:r>
+              <a:rPr lang="ko-KR" altLang="ko-KR" sz="1600" dirty="0" err="1">
+                <a:latin typeface="D2Coding" panose="020B0609020101020101" pitchFamily="49" charset="-127"/>
+                <a:ea typeface="D2Coding" panose="020B0609020101020101" pitchFamily="49" charset="-127"/>
+              </a:rPr>
+              <a:t>VSCode에서</a:t>
+            </a:r>
+            <a:r>
+              <a:rPr lang="ko-KR" altLang="ko-KR" sz="1600" dirty="0">
+                <a:latin typeface="D2Coding" panose="020B0609020101020101" pitchFamily="49" charset="-127"/>
+                <a:ea typeface="D2Coding" panose="020B0609020101020101" pitchFamily="49" charset="-127"/>
+              </a:rPr>
+              <a:t> LLM(대규모 언어 모델) 연동 기능을 제공하고, </a:t>
+            </a:r>
+            <a:r>
+              <a:rPr lang="ko-KR" altLang="ko-KR" sz="1600" dirty="0" err="1">
+                <a:latin typeface="D2Coding" panose="020B0609020101020101" pitchFamily="49" charset="-127"/>
+                <a:ea typeface="D2Coding" panose="020B0609020101020101" pitchFamily="49" charset="-127"/>
+              </a:rPr>
+              <a:t>LLM이</a:t>
+            </a:r>
+            <a:r>
+              <a:rPr lang="ko-KR" altLang="ko-KR" sz="1600" dirty="0">
+                <a:latin typeface="D2Coding" panose="020B0609020101020101" pitchFamily="49" charset="-127"/>
+                <a:ea typeface="D2Coding" panose="020B0609020101020101" pitchFamily="49" charset="-127"/>
+              </a:rPr>
+              <a:t> 직접 코드를 작성/수정</a:t>
+            </a:r>
+            <a:endParaRPr lang="en-US" altLang="ko-KR" sz="1600" dirty="0">
+              <a:latin typeface="D2Coding" panose="020B0609020101020101" pitchFamily="49" charset="-127"/>
+              <a:ea typeface="D2Coding" panose="020B0609020101020101" pitchFamily="49" charset="-127"/>
+            </a:endParaRPr>
+          </a:p>
+          <a:p>
+            <a:pPr marL="285750" indent="-285750">
+              <a:lnSpc>
+                <a:spcPct val="150000"/>
+              </a:lnSpc>
+              <a:buFont typeface="Wingdings" panose="05000000000000000000" pitchFamily="2" charset="2"/>
+              <a:buChar char="v"/>
+            </a:pPr>
+            <a:endParaRPr lang="en-US" altLang="ko-KR" sz="1600" dirty="0">
+              <a:latin typeface="D2Coding" panose="020B0609020101020101" pitchFamily="49" charset="-127"/>
+              <a:ea typeface="D2Coding" panose="020B0609020101020101" pitchFamily="49" charset="-127"/>
+            </a:endParaRPr>
+          </a:p>
+          <a:p>
+            <a:pPr marL="285750" indent="-285750">
+              <a:lnSpc>
+                <a:spcPct val="150000"/>
+              </a:lnSpc>
+              <a:buFont typeface="Wingdings" panose="05000000000000000000" pitchFamily="2" charset="2"/>
+              <a:buChar char="v"/>
+            </a:pPr>
+            <a:r>
+              <a:rPr lang="ko-KR" altLang="ko-KR" sz="1600" dirty="0" err="1">
+                <a:latin typeface="D2Coding" panose="020B0609020101020101" pitchFamily="49" charset="-127"/>
+                <a:ea typeface="D2Coding" panose="020B0609020101020101" pitchFamily="49" charset="-127"/>
+              </a:rPr>
+              <a:t>MCP를</a:t>
+            </a:r>
+            <a:r>
+              <a:rPr lang="ko-KR" altLang="ko-KR" sz="1600" dirty="0">
+                <a:latin typeface="D2Coding" panose="020B0609020101020101" pitchFamily="49" charset="-127"/>
+                <a:ea typeface="D2Coding" panose="020B0609020101020101" pitchFamily="49" charset="-127"/>
+              </a:rPr>
+              <a:t> 사용하여 </a:t>
+            </a:r>
+            <a:r>
+              <a:rPr lang="ko-KR" altLang="ko-KR" sz="1600" dirty="0" err="1">
+                <a:latin typeface="D2Coding" panose="020B0609020101020101" pitchFamily="49" charset="-127"/>
+                <a:ea typeface="D2Coding" panose="020B0609020101020101" pitchFamily="49" charset="-127"/>
+              </a:rPr>
+              <a:t>LLM의</a:t>
+            </a:r>
+            <a:r>
+              <a:rPr lang="ko-KR" altLang="ko-KR" sz="1600" dirty="0">
+                <a:latin typeface="D2Coding" panose="020B0609020101020101" pitchFamily="49" charset="-127"/>
+                <a:ea typeface="D2Coding" panose="020B0609020101020101" pitchFamily="49" charset="-127"/>
+              </a:rPr>
+              <a:t> 기능을 확장하여 사용</a:t>
+            </a:r>
+            <a:endParaRPr lang="en-US" altLang="ko-KR" sz="1600" dirty="0">
+              <a:latin typeface="D2Coding" panose="020B0609020101020101" pitchFamily="49" charset="-127"/>
+              <a:ea typeface="D2Coding" panose="020B0609020101020101" pitchFamily="49" charset="-127"/>
+            </a:endParaRPr>
+          </a:p>
+          <a:p>
+            <a:pPr marL="285750" indent="-285750">
+              <a:lnSpc>
+                <a:spcPct val="150000"/>
+              </a:lnSpc>
+              <a:buFont typeface="Wingdings" panose="05000000000000000000" pitchFamily="2" charset="2"/>
+              <a:buChar char="v"/>
+            </a:pPr>
+            <a:endParaRPr lang="en-US" altLang="ko-KR" sz="1600" dirty="0">
+              <a:latin typeface="D2Coding" panose="020B0609020101020101" pitchFamily="49" charset="-127"/>
+              <a:ea typeface="D2Coding" panose="020B0609020101020101" pitchFamily="49" charset="-127"/>
+            </a:endParaRPr>
+          </a:p>
+          <a:p>
+            <a:pPr marL="285750" indent="-285750">
+              <a:lnSpc>
+                <a:spcPct val="150000"/>
+              </a:lnSpc>
+              <a:buFont typeface="Wingdings" panose="05000000000000000000" pitchFamily="2" charset="2"/>
+              <a:buChar char="v"/>
+            </a:pPr>
+            <a:r>
+              <a:rPr lang="ko-KR" altLang="ko-KR" sz="1600" dirty="0" err="1">
+                <a:latin typeface="D2Coding" panose="020B0609020101020101" pitchFamily="49" charset="-127"/>
+                <a:ea typeface="D2Coding" panose="020B0609020101020101" pitchFamily="49" charset="-127"/>
+              </a:rPr>
+              <a:t>LLM과</a:t>
+            </a:r>
+            <a:r>
+              <a:rPr lang="ko-KR" altLang="ko-KR" sz="1600" dirty="0">
+                <a:latin typeface="D2Coding" panose="020B0609020101020101" pitchFamily="49" charset="-127"/>
+                <a:ea typeface="D2Coding" panose="020B0609020101020101" pitchFamily="49" charset="-127"/>
+              </a:rPr>
+              <a:t> 대화하고, 코드를 생성하거나 </a:t>
+            </a:r>
+            <a:r>
+              <a:rPr lang="ko-KR" altLang="ko-KR" sz="1600" dirty="0" err="1">
+                <a:latin typeface="D2Coding" panose="020B0609020101020101" pitchFamily="49" charset="-127"/>
+                <a:ea typeface="D2Coding" panose="020B0609020101020101" pitchFamily="49" charset="-127"/>
+              </a:rPr>
+              <a:t>리팩토링하는</a:t>
+            </a:r>
+            <a:r>
+              <a:rPr lang="ko-KR" altLang="ko-KR" sz="1600" dirty="0">
+                <a:latin typeface="D2Coding" panose="020B0609020101020101" pitchFamily="49" charset="-127"/>
+                <a:ea typeface="D2Coding" panose="020B0609020101020101" pitchFamily="49" charset="-127"/>
+              </a:rPr>
+              <a:t> 등 개발 워크플로우에 </a:t>
+            </a:r>
+            <a:r>
+              <a:rPr lang="ko-KR" altLang="ko-KR" sz="1600" dirty="0" err="1">
+                <a:latin typeface="D2Coding" panose="020B0609020101020101" pitchFamily="49" charset="-127"/>
+                <a:ea typeface="D2Coding" panose="020B0609020101020101" pitchFamily="49" charset="-127"/>
+              </a:rPr>
+              <a:t>AI를</a:t>
+            </a:r>
+            <a:r>
+              <a:rPr lang="ko-KR" altLang="ko-KR" sz="1600" dirty="0">
+                <a:latin typeface="D2Coding" panose="020B0609020101020101" pitchFamily="49" charset="-127"/>
+                <a:ea typeface="D2Coding" panose="020B0609020101020101" pitchFamily="49" charset="-127"/>
+              </a:rPr>
+              <a:t> 직접 통합</a:t>
+            </a:r>
+            <a:r>
+              <a:rPr lang="en-US" altLang="ko-KR" sz="1600" dirty="0">
+                <a:latin typeface="D2Coding" panose="020B0609020101020101" pitchFamily="49" charset="-127"/>
+                <a:ea typeface="D2Coding" panose="020B0609020101020101" pitchFamily="49" charset="-127"/>
+              </a:rPr>
+              <a:t> </a:t>
+            </a:r>
+            <a:r>
+              <a:rPr lang="ko-KR" altLang="en-US" sz="1600" dirty="0">
+                <a:latin typeface="D2Coding" panose="020B0609020101020101" pitchFamily="49" charset="-127"/>
+                <a:ea typeface="D2Coding" panose="020B0609020101020101" pitchFamily="49" charset="-127"/>
+              </a:rPr>
+              <a:t>도구</a:t>
+            </a:r>
+            <a:endParaRPr lang="en-US" altLang="ko-KR" sz="1600" dirty="0">
+              <a:latin typeface="D2Coding" panose="020B0609020101020101" pitchFamily="49" charset="-127"/>
+              <a:ea typeface="D2Coding" panose="020B0609020101020101" pitchFamily="49" charset="-127"/>
+            </a:endParaRPr>
+          </a:p>
+          <a:p>
+            <a:pPr marL="285750" indent="-285750">
+              <a:lnSpc>
+                <a:spcPct val="150000"/>
+              </a:lnSpc>
+              <a:buFont typeface="Wingdings" panose="05000000000000000000" pitchFamily="2" charset="2"/>
+              <a:buChar char="v"/>
+            </a:pPr>
+            <a:endParaRPr lang="en-US" altLang="ko-KR" sz="1600" dirty="0">
+              <a:latin typeface="D2Coding" panose="020B0609020101020101" pitchFamily="49" charset="-127"/>
+              <a:ea typeface="D2Coding" panose="020B0609020101020101" pitchFamily="49" charset="-127"/>
+            </a:endParaRPr>
+          </a:p>
+          <a:p>
+            <a:pPr marL="285750" indent="-285750">
+              <a:lnSpc>
+                <a:spcPct val="150000"/>
+              </a:lnSpc>
+              <a:buFont typeface="Wingdings" panose="05000000000000000000" pitchFamily="2" charset="2"/>
+              <a:buChar char="v"/>
+            </a:pPr>
+            <a:r>
+              <a:rPr lang="ko-KR" altLang="ko-KR" sz="1600" dirty="0">
+                <a:latin typeface="D2Coding" panose="020B0609020101020101" pitchFamily="49" charset="-127"/>
+                <a:ea typeface="D2Coding" panose="020B0609020101020101" pitchFamily="49" charset="-127"/>
+              </a:rPr>
+              <a:t>터미널(CLI)</a:t>
+            </a:r>
+            <a:r>
+              <a:rPr lang="ko-KR" altLang="en-US" sz="1600" dirty="0">
+                <a:latin typeface="D2Coding" panose="020B0609020101020101" pitchFamily="49" charset="-127"/>
+                <a:ea typeface="D2Coding" panose="020B0609020101020101" pitchFamily="49" charset="-127"/>
+              </a:rPr>
+              <a:t>기반과 </a:t>
+            </a:r>
+            <a:r>
+              <a:rPr lang="ko-KR" altLang="ko-KR" sz="1600" dirty="0">
+                <a:latin typeface="D2Coding" panose="020B0609020101020101" pitchFamily="49" charset="-127"/>
+                <a:ea typeface="D2Coding" panose="020B0609020101020101" pitchFamily="49" charset="-127"/>
+              </a:rPr>
+              <a:t>IDE(통합개발환경) 환경을 결합</a:t>
+            </a:r>
+            <a:r>
+              <a:rPr lang="ko-KR" altLang="en-US" sz="1600" dirty="0">
+                <a:latin typeface="D2Coding" panose="020B0609020101020101" pitchFamily="49" charset="-127"/>
+                <a:ea typeface="D2Coding" panose="020B0609020101020101" pitchFamily="49" charset="-127"/>
+              </a:rPr>
+              <a:t>한 </a:t>
+            </a:r>
+            <a:r>
+              <a:rPr lang="ko-KR" altLang="ko-KR" sz="1600" dirty="0">
+                <a:latin typeface="D2Coding" panose="020B0609020101020101" pitchFamily="49" charset="-127"/>
+                <a:ea typeface="D2Coding" panose="020B0609020101020101" pitchFamily="49" charset="-127"/>
+              </a:rPr>
+              <a:t>에이전트 기능을 쓸 수 있게 만든 도구</a:t>
+            </a:r>
+          </a:p>
+        </p:txBody>
+      </p:sp>
+    </p:spTree>
+    <p:extLst>
+      <p:ext uri="{BB962C8B-B14F-4D97-AF65-F5344CB8AC3E}">
+        <p14:creationId xmlns:p14="http://schemas.microsoft.com/office/powerpoint/2010/main" val="629184913"/>
+      </p:ext>
+    </p:extLst>
+  </p:cSld>
+  <p:clrMapOvr>
+    <a:masterClrMapping/>
+  </p:clrMapOvr>
+</p:sld>
+</file>
+
+<file path=ppt/slides/slide32.xml><?xml version="1.0" encoding="utf-8"?>
+<p:sld xmlns:a="http://schemas.openxmlformats.org/drawingml/2006/main" xmlns:r="http://schemas.openxmlformats.org/officeDocument/2006/relationships" xmlns:p="http://schemas.openxmlformats.org/presentationml/2006/main">
+  <p:cSld>
+    <p:spTree>
+      <p:nvGrpSpPr>
+        <p:cNvPr id="1" name="">
+          <a:extLst>
+            <a:ext uri="{FF2B5EF4-FFF2-40B4-BE49-F238E27FC236}">
+              <a16:creationId xmlns:a16="http://schemas.microsoft.com/office/drawing/2014/main" id="{0D34C4B3-3BBC-1CC5-8F0A-9151144B923E}"/>
+            </a:ext>
+          </a:extLst>
+        </p:cNvPr>
+        <p:cNvGrpSpPr/>
+        <p:nvPr/>
+      </p:nvGrpSpPr>
+      <p:grpSpPr>
+        <a:xfrm>
+          <a:off x="0" y="0"/>
+          <a:ext cx="0" cy="0"/>
+          <a:chOff x="0" y="0"/>
+          <a:chExt cx="0" cy="0"/>
+        </a:xfrm>
+      </p:grpSpPr>
+      <p:sp>
+        <p:nvSpPr>
+          <p:cNvPr id="4" name="슬라이드 번호 개체 틀 3">
+            <a:extLst>
+              <a:ext uri="{FF2B5EF4-FFF2-40B4-BE49-F238E27FC236}">
+                <a16:creationId xmlns:a16="http://schemas.microsoft.com/office/drawing/2014/main" id="{4E8224DF-5630-1D26-2697-A17613036C2A}"/>
+              </a:ext>
+            </a:extLst>
+          </p:cNvPr>
+          <p:cNvSpPr>
+            <a:spLocks noGrp="1"/>
+          </p:cNvSpPr>
+          <p:nvPr>
+            <p:ph type="sldNum" sz="quarter" idx="12"/>
+          </p:nvPr>
+        </p:nvSpPr>
+        <p:spPr>
+          <a:xfrm>
+            <a:off x="10514011" y="6036261"/>
+            <a:ext cx="753545" cy="365125"/>
+          </a:xfrm>
+        </p:spPr>
+        <p:txBody>
+          <a:bodyPr/>
+          <a:lstStyle/>
+          <a:p>
+            <a:fld id="{D57F1E4F-1CFF-5643-939E-217C01CDF565}" type="slidenum">
+              <a:rPr lang="en-US" smtClean="0"/>
+              <a:pPr/>
+              <a:t>32</a:t>
+            </a:fld>
+            <a:endParaRPr lang="en-US" dirty="0"/>
+          </a:p>
+        </p:txBody>
+      </p:sp>
+      <p:sp>
+        <p:nvSpPr>
+          <p:cNvPr id="3" name="제목 1">
+            <a:extLst>
+              <a:ext uri="{FF2B5EF4-FFF2-40B4-BE49-F238E27FC236}">
+                <a16:creationId xmlns:a16="http://schemas.microsoft.com/office/drawing/2014/main" id="{F8327ECC-9959-5AFE-7237-F43E91A0F29D}"/>
+              </a:ext>
+            </a:extLst>
+          </p:cNvPr>
+          <p:cNvSpPr txBox="1">
+            <a:spLocks/>
+          </p:cNvSpPr>
+          <p:nvPr/>
+        </p:nvSpPr>
+        <p:spPr>
+          <a:xfrm>
+            <a:off x="475645" y="481983"/>
+            <a:ext cx="10353762" cy="766439"/>
+          </a:xfrm>
+          <a:prstGeom prst="rect">
+            <a:avLst/>
+          </a:prstGeom>
+        </p:spPr>
+        <p:txBody>
+          <a:bodyPr vert="horz" lIns="91440" tIns="45720" rIns="91440" bIns="45720" rtlCol="0" anchor="ctr">
+            <a:normAutofit/>
+          </a:bodyPr>
+          <a:lstStyle>
+            <a:lvl1pPr algn="ctr" defTabSz="914400" rtl="0" eaLnBrk="1" latinLnBrk="1" hangingPunct="1">
+              <a:lnSpc>
+                <a:spcPct val="90000"/>
+              </a:lnSpc>
+              <a:spcBef>
+                <a:spcPct val="0"/>
+              </a:spcBef>
+              <a:buNone/>
+              <a:defRPr sz="3200" kern="1200" cap="all" baseline="0">
+                <a:solidFill>
+                  <a:schemeClr val="tx1"/>
+                </a:solidFill>
+                <a:effectLst/>
+                <a:latin typeface="Batang" panose="02030600000101010101" pitchFamily="18" charset="-127"/>
+                <a:ea typeface="Batang" panose="02030600000101010101" pitchFamily="18" charset="-127"/>
+                <a:cs typeface="+mj-cs"/>
+              </a:defRPr>
+            </a:lvl1pPr>
+          </a:lstStyle>
+          <a:p>
+            <a:pPr algn="l"/>
+            <a:r>
+              <a:rPr lang="en-US" altLang="ko-KR" sz="2800" b="1" cap="none" dirty="0">
+                <a:latin typeface="Lora" pitchFamily="2" charset="0"/>
+              </a:rPr>
+              <a:t>Cline </a:t>
+            </a:r>
+            <a:r>
+              <a:rPr lang="ko-KR" altLang="en-US" sz="2800" b="1" cap="none" dirty="0">
+                <a:latin typeface="Lora" pitchFamily="2" charset="0"/>
+              </a:rPr>
+              <a:t>주요</a:t>
+            </a:r>
+            <a:r>
+              <a:rPr lang="en-US" altLang="ko-KR" sz="2800" b="1" cap="none" dirty="0">
+                <a:latin typeface="Lora" pitchFamily="2" charset="0"/>
+              </a:rPr>
+              <a:t> </a:t>
+            </a:r>
+            <a:r>
+              <a:rPr lang="ko-KR" altLang="en-US" sz="2800" b="1" cap="none" dirty="0">
+                <a:latin typeface="Lora" pitchFamily="2" charset="0"/>
+              </a:rPr>
+              <a:t>기능</a:t>
+            </a:r>
+            <a:r>
+              <a:rPr lang="en-US" altLang="ko-KR" sz="2800" b="1" cap="none" dirty="0">
+                <a:latin typeface="Lora" pitchFamily="2" charset="0"/>
+              </a:rPr>
+              <a:t> </a:t>
+            </a:r>
+            <a:r>
+              <a:rPr lang="ko-KR" altLang="en-US" sz="2800" b="1" cap="none" dirty="0">
+                <a:latin typeface="Lora" pitchFamily="2" charset="0"/>
+              </a:rPr>
+              <a:t>및</a:t>
+            </a:r>
+            <a:r>
+              <a:rPr lang="en-US" altLang="ko-KR" sz="2800" b="1" cap="none" dirty="0">
+                <a:latin typeface="Lora" pitchFamily="2" charset="0"/>
+              </a:rPr>
+              <a:t> </a:t>
+            </a:r>
+            <a:r>
+              <a:rPr lang="ko-KR" altLang="en-US" sz="2800" b="1" cap="none" dirty="0">
+                <a:latin typeface="Lora" pitchFamily="2" charset="0"/>
+              </a:rPr>
+              <a:t>특징</a:t>
+            </a:r>
+            <a:endParaRPr lang="en-US" altLang="ko-KR" sz="2800" b="1" cap="none" dirty="0">
+              <a:latin typeface="Lora" pitchFamily="2" charset="0"/>
+            </a:endParaRPr>
+          </a:p>
+        </p:txBody>
+      </p:sp>
+      <p:sp>
+        <p:nvSpPr>
+          <p:cNvPr id="5" name="TextBox 4">
+            <a:extLst>
+              <a:ext uri="{FF2B5EF4-FFF2-40B4-BE49-F238E27FC236}">
+                <a16:creationId xmlns:a16="http://schemas.microsoft.com/office/drawing/2014/main" id="{23A818D7-538E-939A-40B0-74D19780A209}"/>
+              </a:ext>
+            </a:extLst>
+          </p:cNvPr>
+          <p:cNvSpPr txBox="1"/>
+          <p:nvPr/>
+        </p:nvSpPr>
+        <p:spPr>
+          <a:xfrm>
+            <a:off x="544944" y="1510391"/>
+            <a:ext cx="11028219" cy="5225148"/>
+          </a:xfrm>
+          <a:prstGeom prst="rect">
+            <a:avLst/>
+          </a:prstGeom>
+          <a:noFill/>
+        </p:spPr>
+        <p:txBody>
+          <a:bodyPr wrap="square">
+            <a:spAutoFit/>
+          </a:bodyPr>
+          <a:lstStyle/>
+          <a:p>
+            <a:pPr marL="285750" indent="-285750">
+              <a:lnSpc>
+                <a:spcPct val="150000"/>
+              </a:lnSpc>
+              <a:buFont typeface="Wingdings" panose="05000000000000000000" pitchFamily="2" charset="2"/>
+              <a:buChar char="v"/>
+            </a:pPr>
+            <a:r>
+              <a:rPr lang="ko-KR" altLang="ko-KR" sz="1600" dirty="0">
+                <a:latin typeface="D2Coding" panose="020B0609020101020101" pitchFamily="49" charset="-127"/>
+                <a:ea typeface="D2Coding" panose="020B0609020101020101" pitchFamily="49" charset="-127"/>
+              </a:rPr>
+              <a:t>코드 개발 지원: 컨텍스트를 인식하는 코드 제안, 자동 완성 및 지능적인 권장 사항을 제공하여 개발 시간을 단축하고 코딩 오류를 최소화</a:t>
+            </a:r>
+            <a:endParaRPr lang="en-US" altLang="ko-KR" sz="1600" dirty="0">
+              <a:latin typeface="D2Coding" panose="020B0609020101020101" pitchFamily="49" charset="-127"/>
+              <a:ea typeface="D2Coding" panose="020B0609020101020101" pitchFamily="49" charset="-127"/>
+            </a:endParaRPr>
+          </a:p>
+          <a:p>
+            <a:pPr marL="285750" indent="-285750">
+              <a:lnSpc>
+                <a:spcPct val="150000"/>
+              </a:lnSpc>
+              <a:buFont typeface="Wingdings" panose="05000000000000000000" pitchFamily="2" charset="2"/>
+              <a:buChar char="v"/>
+            </a:pPr>
+            <a:endParaRPr lang="en-US" altLang="ko-KR" sz="1600" dirty="0">
+              <a:latin typeface="D2Coding" panose="020B0609020101020101" pitchFamily="49" charset="-127"/>
+              <a:ea typeface="D2Coding" panose="020B0609020101020101" pitchFamily="49" charset="-127"/>
+            </a:endParaRPr>
+          </a:p>
+          <a:p>
+            <a:pPr marL="285750" indent="-285750">
+              <a:lnSpc>
+                <a:spcPct val="150000"/>
+              </a:lnSpc>
+              <a:buFont typeface="Wingdings" panose="05000000000000000000" pitchFamily="2" charset="2"/>
+              <a:buChar char="v"/>
+            </a:pPr>
+            <a:r>
+              <a:rPr lang="ko-KR" altLang="ko-KR" sz="1600" dirty="0">
+                <a:latin typeface="D2Coding" panose="020B0609020101020101" pitchFamily="49" charset="-127"/>
+                <a:ea typeface="D2Coding" panose="020B0609020101020101" pitchFamily="49" charset="-127"/>
+              </a:rPr>
+              <a:t>다양한 작업 수행: 파일 읽기/쓰기, 명령 실행, 웹 브라우저 사용 등 다양한 시스템 수준 작업을 수행</a:t>
+            </a:r>
+            <a:endParaRPr lang="en-US" altLang="ko-KR" sz="1600" dirty="0">
+              <a:latin typeface="D2Coding" panose="020B0609020101020101" pitchFamily="49" charset="-127"/>
+              <a:ea typeface="D2Coding" panose="020B0609020101020101" pitchFamily="49" charset="-127"/>
+            </a:endParaRPr>
+          </a:p>
+          <a:p>
+            <a:pPr marL="285750" indent="-285750">
+              <a:lnSpc>
+                <a:spcPct val="150000"/>
+              </a:lnSpc>
+              <a:buFont typeface="Wingdings" panose="05000000000000000000" pitchFamily="2" charset="2"/>
+              <a:buChar char="v"/>
+            </a:pPr>
+            <a:endParaRPr lang="en-US" altLang="ko-KR" sz="1600" dirty="0">
+              <a:latin typeface="D2Coding" panose="020B0609020101020101" pitchFamily="49" charset="-127"/>
+              <a:ea typeface="D2Coding" panose="020B0609020101020101" pitchFamily="49" charset="-127"/>
+            </a:endParaRPr>
+          </a:p>
+          <a:p>
+            <a:pPr marL="285750" indent="-285750">
+              <a:lnSpc>
+                <a:spcPct val="150000"/>
+              </a:lnSpc>
+              <a:buFont typeface="Wingdings" panose="05000000000000000000" pitchFamily="2" charset="2"/>
+              <a:buChar char="v"/>
+            </a:pPr>
+            <a:r>
+              <a:rPr lang="ko-KR" altLang="ko-KR" sz="1600" dirty="0">
+                <a:latin typeface="D2Coding" panose="020B0609020101020101" pitchFamily="49" charset="-127"/>
+                <a:ea typeface="D2Coding" panose="020B0609020101020101" pitchFamily="49" charset="-127"/>
+              </a:rPr>
+              <a:t>모델 유연성: 다양한 AI 모델의 강점을 활용하는 정교한 워크플로우를 가능</a:t>
+            </a:r>
+            <a:endParaRPr lang="en-US" altLang="ko-KR" sz="1600" dirty="0">
+              <a:latin typeface="D2Coding" panose="020B0609020101020101" pitchFamily="49" charset="-127"/>
+              <a:ea typeface="D2Coding" panose="020B0609020101020101" pitchFamily="49" charset="-127"/>
+            </a:endParaRPr>
+          </a:p>
+          <a:p>
+            <a:pPr marL="285750" indent="-285750">
+              <a:lnSpc>
+                <a:spcPct val="150000"/>
+              </a:lnSpc>
+              <a:buFont typeface="Wingdings" panose="05000000000000000000" pitchFamily="2" charset="2"/>
+              <a:buChar char="v"/>
+            </a:pPr>
+            <a:endParaRPr lang="en-US" altLang="ko-KR" sz="1600" dirty="0">
+              <a:latin typeface="D2Coding" panose="020B0609020101020101" pitchFamily="49" charset="-127"/>
+              <a:ea typeface="D2Coding" panose="020B0609020101020101" pitchFamily="49" charset="-127"/>
+            </a:endParaRPr>
+          </a:p>
+          <a:p>
+            <a:pPr marL="285750" indent="-285750">
+              <a:lnSpc>
+                <a:spcPct val="150000"/>
+              </a:lnSpc>
+              <a:buFont typeface="Wingdings" panose="05000000000000000000" pitchFamily="2" charset="2"/>
+              <a:buChar char="v"/>
+            </a:pPr>
+            <a:r>
+              <a:rPr lang="ko-KR" altLang="ko-KR" sz="1600" dirty="0">
+                <a:latin typeface="D2Coding" panose="020B0609020101020101" pitchFamily="49" charset="-127"/>
+                <a:ea typeface="D2Coding" panose="020B0609020101020101" pitchFamily="49" charset="-127"/>
+              </a:rPr>
+              <a:t>프롬프트 피로 감소: 프롬프트 피로를 줄이고 상호 작용을 더욱 자연스</a:t>
+            </a:r>
+            <a:r>
+              <a:rPr lang="ko-KR" altLang="en-US" sz="1600" dirty="0">
+                <a:latin typeface="D2Coding" panose="020B0609020101020101" pitchFamily="49" charset="-127"/>
+                <a:ea typeface="D2Coding" panose="020B0609020101020101" pitchFamily="49" charset="-127"/>
+              </a:rPr>
+              <a:t>러움</a:t>
+            </a:r>
+            <a:endParaRPr lang="en-US" altLang="ko-KR" sz="1600" dirty="0">
+              <a:latin typeface="D2Coding" panose="020B0609020101020101" pitchFamily="49" charset="-127"/>
+              <a:ea typeface="D2Coding" panose="020B0609020101020101" pitchFamily="49" charset="-127"/>
+            </a:endParaRPr>
+          </a:p>
+          <a:p>
+            <a:pPr marL="285750" indent="-285750">
+              <a:lnSpc>
+                <a:spcPct val="150000"/>
+              </a:lnSpc>
+              <a:buFont typeface="Wingdings" panose="05000000000000000000" pitchFamily="2" charset="2"/>
+              <a:buChar char="v"/>
+            </a:pPr>
+            <a:endParaRPr lang="en-US" altLang="ko-KR" sz="1600" dirty="0">
+              <a:latin typeface="D2Coding" panose="020B0609020101020101" pitchFamily="49" charset="-127"/>
+              <a:ea typeface="D2Coding" panose="020B0609020101020101" pitchFamily="49" charset="-127"/>
+            </a:endParaRPr>
+          </a:p>
+          <a:p>
+            <a:pPr marL="285750" indent="-285750">
+              <a:lnSpc>
+                <a:spcPct val="150000"/>
+              </a:lnSpc>
+              <a:buFont typeface="Wingdings" panose="05000000000000000000" pitchFamily="2" charset="2"/>
+              <a:buChar char="v"/>
+            </a:pPr>
+            <a:r>
+              <a:rPr lang="ko-KR" altLang="ko-KR" sz="1600" dirty="0">
+                <a:latin typeface="D2Coding" panose="020B0609020101020101" pitchFamily="49" charset="-127"/>
+                <a:ea typeface="D2Coding" panose="020B0609020101020101" pitchFamily="49" charset="-127"/>
+              </a:rPr>
+              <a:t>확장성 (</a:t>
+            </a:r>
+            <a:r>
+              <a:rPr lang="ko-KR" altLang="ko-KR" sz="1600" dirty="0" err="1">
+                <a:latin typeface="D2Coding" panose="020B0609020101020101" pitchFamily="49" charset="-127"/>
+                <a:ea typeface="D2Coding" panose="020B0609020101020101" pitchFamily="49" charset="-127"/>
+              </a:rPr>
+              <a:t>Model</a:t>
+            </a:r>
+            <a:r>
+              <a:rPr lang="ko-KR" altLang="ko-KR" sz="1600" dirty="0">
+                <a:latin typeface="D2Coding" panose="020B0609020101020101" pitchFamily="49" charset="-127"/>
+                <a:ea typeface="D2Coding" panose="020B0609020101020101" pitchFamily="49" charset="-127"/>
+              </a:rPr>
+              <a:t> </a:t>
+            </a:r>
+            <a:r>
+              <a:rPr lang="ko-KR" altLang="ko-KR" sz="1600" dirty="0" err="1">
+                <a:latin typeface="D2Coding" panose="020B0609020101020101" pitchFamily="49" charset="-127"/>
+                <a:ea typeface="D2Coding" panose="020B0609020101020101" pitchFamily="49" charset="-127"/>
+              </a:rPr>
+              <a:t>Context</a:t>
+            </a:r>
+            <a:r>
+              <a:rPr lang="ko-KR" altLang="ko-KR" sz="1600" dirty="0">
+                <a:latin typeface="D2Coding" panose="020B0609020101020101" pitchFamily="49" charset="-127"/>
+                <a:ea typeface="D2Coding" panose="020B0609020101020101" pitchFamily="49" charset="-127"/>
+              </a:rPr>
+              <a:t> </a:t>
+            </a:r>
+            <a:r>
+              <a:rPr lang="ko-KR" altLang="ko-KR" sz="1600" dirty="0" err="1">
+                <a:latin typeface="D2Coding" panose="020B0609020101020101" pitchFamily="49" charset="-127"/>
+                <a:ea typeface="D2Coding" panose="020B0609020101020101" pitchFamily="49" charset="-127"/>
+              </a:rPr>
+              <a:t>Protocol</a:t>
+            </a:r>
+            <a:r>
+              <a:rPr lang="ko-KR" altLang="ko-KR" sz="1600" dirty="0">
+                <a:latin typeface="D2Coding" panose="020B0609020101020101" pitchFamily="49" charset="-127"/>
+                <a:ea typeface="D2Coding" panose="020B0609020101020101" pitchFamily="49" charset="-127"/>
+              </a:rPr>
+              <a:t> - MCP): </a:t>
+            </a:r>
+            <a:r>
+              <a:rPr lang="ko-KR" altLang="ko-KR" sz="1600" dirty="0" err="1">
+                <a:latin typeface="D2Coding" panose="020B0609020101020101" pitchFamily="49" charset="-127"/>
+                <a:ea typeface="D2Coding" panose="020B0609020101020101" pitchFamily="49" charset="-127"/>
+              </a:rPr>
+              <a:t>Model</a:t>
+            </a:r>
+            <a:r>
+              <a:rPr lang="ko-KR" altLang="ko-KR" sz="1600" dirty="0">
+                <a:latin typeface="D2Coding" panose="020B0609020101020101" pitchFamily="49" charset="-127"/>
+                <a:ea typeface="D2Coding" panose="020B0609020101020101" pitchFamily="49" charset="-127"/>
+              </a:rPr>
+              <a:t> </a:t>
+            </a:r>
+            <a:r>
+              <a:rPr lang="ko-KR" altLang="ko-KR" sz="1600" dirty="0" err="1">
+                <a:latin typeface="D2Coding" panose="020B0609020101020101" pitchFamily="49" charset="-127"/>
+                <a:ea typeface="D2Coding" panose="020B0609020101020101" pitchFamily="49" charset="-127"/>
+              </a:rPr>
+              <a:t>Context</a:t>
+            </a:r>
+            <a:r>
+              <a:rPr lang="ko-KR" altLang="ko-KR" sz="1600" dirty="0">
+                <a:latin typeface="D2Coding" panose="020B0609020101020101" pitchFamily="49" charset="-127"/>
+                <a:ea typeface="D2Coding" panose="020B0609020101020101" pitchFamily="49" charset="-127"/>
+              </a:rPr>
+              <a:t> </a:t>
+            </a:r>
+            <a:r>
+              <a:rPr lang="ko-KR" altLang="ko-KR" sz="1600" dirty="0" err="1">
+                <a:latin typeface="D2Coding" panose="020B0609020101020101" pitchFamily="49" charset="-127"/>
+                <a:ea typeface="D2Coding" panose="020B0609020101020101" pitchFamily="49" charset="-127"/>
+              </a:rPr>
+              <a:t>Protocol을</a:t>
+            </a:r>
+            <a:r>
+              <a:rPr lang="ko-KR" altLang="ko-KR" sz="1600" dirty="0">
+                <a:latin typeface="D2Coding" panose="020B0609020101020101" pitchFamily="49" charset="-127"/>
+                <a:ea typeface="D2Coding" panose="020B0609020101020101" pitchFamily="49" charset="-127"/>
+              </a:rPr>
+              <a:t> 통해 사용자 정의 도구 및 워크플로우와 통합할 수 있어 특정 요구 사항에 맞게 조정</a:t>
+            </a:r>
+            <a:endParaRPr lang="en-US" altLang="ko-KR" sz="1600" dirty="0">
+              <a:latin typeface="D2Coding" panose="020B0609020101020101" pitchFamily="49" charset="-127"/>
+              <a:ea typeface="D2Coding" panose="020B0609020101020101" pitchFamily="49" charset="-127"/>
+            </a:endParaRPr>
+          </a:p>
+          <a:p>
+            <a:pPr marL="285750" indent="-285750">
+              <a:lnSpc>
+                <a:spcPct val="150000"/>
+              </a:lnSpc>
+              <a:buFont typeface="Wingdings" panose="05000000000000000000" pitchFamily="2" charset="2"/>
+              <a:buChar char="v"/>
+            </a:pPr>
+            <a:endParaRPr lang="en-US" altLang="ko-KR" sz="1600" dirty="0">
+              <a:latin typeface="D2Coding" panose="020B0609020101020101" pitchFamily="49" charset="-127"/>
+              <a:ea typeface="D2Coding" panose="020B0609020101020101" pitchFamily="49" charset="-127"/>
+            </a:endParaRPr>
+          </a:p>
+          <a:p>
+            <a:pPr marL="285750" indent="-285750">
+              <a:lnSpc>
+                <a:spcPct val="150000"/>
+              </a:lnSpc>
+              <a:buFont typeface="Wingdings" panose="05000000000000000000" pitchFamily="2" charset="2"/>
+              <a:buChar char="v"/>
+            </a:pPr>
+            <a:r>
+              <a:rPr lang="ko-KR" altLang="ko-KR" sz="1600" dirty="0">
+                <a:latin typeface="D2Coding" panose="020B0609020101020101" pitchFamily="49" charset="-127"/>
+                <a:ea typeface="D2Coding" panose="020B0609020101020101" pitchFamily="49" charset="-127"/>
+              </a:rPr>
+              <a:t>복잡한 시스템에 적합: 제어, 유연성 및 시스템 수준 통합이 중요한 복잡한 시스템을 구축</a:t>
+            </a:r>
+            <a:r>
+              <a:rPr lang="ko-KR" altLang="en-US" sz="1600" dirty="0">
+                <a:latin typeface="D2Coding" panose="020B0609020101020101" pitchFamily="49" charset="-127"/>
+                <a:ea typeface="D2Coding" panose="020B0609020101020101" pitchFamily="49" charset="-127"/>
+              </a:rPr>
+              <a:t>에 적합</a:t>
+            </a:r>
+            <a:endParaRPr lang="ko-KR" altLang="ko-KR" sz="1600" dirty="0">
+              <a:latin typeface="D2Coding" panose="020B0609020101020101" pitchFamily="49" charset="-127"/>
+              <a:ea typeface="D2Coding" panose="020B0609020101020101" pitchFamily="49" charset="-127"/>
+            </a:endParaRPr>
+          </a:p>
+          <a:p>
+            <a:pPr marL="285750" indent="-285750">
+              <a:lnSpc>
+                <a:spcPct val="150000"/>
+              </a:lnSpc>
+              <a:buFont typeface="Wingdings" panose="05000000000000000000" pitchFamily="2" charset="2"/>
+              <a:buChar char="v"/>
+            </a:pPr>
+            <a:endParaRPr lang="en-US" altLang="ko-KR" sz="1600" dirty="0">
+              <a:latin typeface="D2Coding" panose="020B0609020101020101" pitchFamily="49" charset="-127"/>
+              <a:ea typeface="D2Coding" panose="020B0609020101020101" pitchFamily="49" charset="-127"/>
+            </a:endParaRPr>
+          </a:p>
+        </p:txBody>
+      </p:sp>
+    </p:spTree>
+    <p:extLst>
+      <p:ext uri="{BB962C8B-B14F-4D97-AF65-F5344CB8AC3E}">
+        <p14:creationId xmlns:p14="http://schemas.microsoft.com/office/powerpoint/2010/main" val="3121391131"/>
+      </p:ext>
+    </p:extLst>
+  </p:cSld>
+  <p:clrMapOvr>
+    <a:masterClrMapping/>
+  </p:clrMapOvr>
+</p:sld>
+</file>
+
+<file path=ppt/slides/slide33.xml><?xml version="1.0" encoding="utf-8"?>
+<p:sld xmlns:a="http://schemas.openxmlformats.org/drawingml/2006/main" xmlns:r="http://schemas.openxmlformats.org/officeDocument/2006/relationships" xmlns:p="http://schemas.openxmlformats.org/presentationml/2006/main">
+  <p:cSld>
+    <p:spTree>
+      <p:nvGrpSpPr>
         <p:cNvPr id="1" name="Shape 487">
           <a:extLst>
             <a:ext uri="{FF2B5EF4-FFF2-40B4-BE49-F238E27FC236}">
@@ -22575,7 +23566,7 @@
                 <a:ea typeface="Segoe UI Emoji" panose="020B0502040204020203" pitchFamily="34" charset="0"/>
               </a:rPr>
               <a:pPr/>
-              <a:t>31</a:t>
+              <a:t>33</a:t>
             </a:fld>
             <a:endParaRPr lang="en-US" b="1" dirty="0">
               <a:latin typeface="Segoe UI Emoji" panose="020B0502040204020203" pitchFamily="34" charset="0"/>
@@ -22663,7 +23654,7 @@
 </p:sld>
 </file>
 
-<file path=ppt/slides/slide32.xml><?xml version="1.0" encoding="utf-8"?>
+<file path=ppt/slides/slide34.xml><?xml version="1.0" encoding="utf-8"?>
 <p:sld xmlns:a="http://schemas.openxmlformats.org/drawingml/2006/main" xmlns:r="http://schemas.openxmlformats.org/officeDocument/2006/relationships" xmlns:p="http://schemas.openxmlformats.org/presentationml/2006/main">
   <p:cSld>
     <p:spTree>
@@ -22891,7 +23882,7 @@
                 <a:ea typeface="Segoe UI Emoji" panose="020B0502040204020203" pitchFamily="34" charset="0"/>
               </a:rPr>
               <a:pPr/>
-              <a:t>32</a:t>
+              <a:t>34</a:t>
             </a:fld>
             <a:endParaRPr lang="en-US" b="1" dirty="0">
               <a:latin typeface="Segoe UI Emoji" panose="020B0502040204020203" pitchFamily="34" charset="0"/>
@@ -23031,7 +24022,7 @@
 </p:sld>
 </file>
 
-<file path=ppt/slides/slide33.xml><?xml version="1.0" encoding="utf-8"?>
+<file path=ppt/slides/slide35.xml><?xml version="1.0" encoding="utf-8"?>
 <p:sld xmlns:a="http://schemas.openxmlformats.org/drawingml/2006/main" xmlns:r="http://schemas.openxmlformats.org/officeDocument/2006/relationships" xmlns:p="http://schemas.openxmlformats.org/presentationml/2006/main">
   <p:cSld>
     <p:spTree>
@@ -23324,7 +24315,7 @@
                 <a:ea typeface="Segoe UI Emoji" panose="020B0502040204020203" pitchFamily="34" charset="0"/>
               </a:rPr>
               <a:pPr/>
-              <a:t>33</a:t>
+              <a:t>35</a:t>
             </a:fld>
             <a:endParaRPr lang="en-US" b="1" dirty="0">
               <a:latin typeface="Segoe UI Emoji" panose="020B0502040204020203" pitchFamily="34" charset="0"/>
@@ -23512,7 +24503,7 @@
 </p:sld>
 </file>
 
-<file path=ppt/slides/slide34.xml><?xml version="1.0" encoding="utf-8"?>
+<file path=ppt/slides/slide36.xml><?xml version="1.0" encoding="utf-8"?>
 <p:sld xmlns:a="http://schemas.openxmlformats.org/drawingml/2006/main" xmlns:r="http://schemas.openxmlformats.org/officeDocument/2006/relationships" xmlns:p="http://schemas.openxmlformats.org/presentationml/2006/main">
   <p:cSld>
     <p:spTree>
@@ -23844,7 +24835,7 @@
                 <a:ea typeface="Segoe UI Emoji" panose="020B0502040204020203" pitchFamily="34" charset="0"/>
               </a:rPr>
               <a:pPr/>
-              <a:t>34</a:t>
+              <a:t>36</a:t>
             </a:fld>
             <a:endParaRPr lang="en-US" b="1" dirty="0">
               <a:latin typeface="Segoe UI Emoji" panose="020B0502040204020203" pitchFamily="34" charset="0"/>
